--- a/slides/pptx/week11.pptx
+++ b/slides/pptx/week11.pptx
@@ -1659,7 +1659,8 @@
           <a:p>
             <a:r>
               <a:rPr lang="en-US" dirty="0"/>
-              <a:t>Walk it top to bottom exactly once — this is the whole week's argument as one picture: which mitigation actually stops THIS exploit, and in what order they'd fire if more than one were present. Land on the same correction as the last slide: FORTIFY wins the race against the canary, every time, on this build. ~4 min.</a:t>
+              <a:t>Walk it top to bottom exactly once — this is the whole week's argument as one picture: which mitigation actually stops THIS exploit, and in what order they'd fire if more than one were present. Land on the same correction as the last slide: FORTIFY wins the race against the canary, every time, on this build. ~4 min.
+Diagram: A vertical attack chain from fuzzing finding the crash, to the unchecked strcpy overflow, to the overwritten return address, to a ret2win shell. Three mitigations cut this chain at different links: FORTIFY_SOURCE aborts at copy time, before any overwrite — this hardened build traps here, which students often misread as the canary. The stack canary only detects the smash at return, after the copy already happened. ASLR/PIE randomizes addresses so the fixed win() address is wrong. NX/DEP stops the OTHER exploitation path (injected shellcode), not this one.</a:t>
             </a:r>
             <a:endParaRPr lang="en-US" dirty="0"/>
           </a:p>
@@ -2034,7 +2035,7 @@
       </p:grpSpPr>
       <p:pic>
         <p:nvPicPr>
-          <p:cNvPr id="2" name="Image 0" descr="/Users/pop7/Library/CloudStorage/OneDrive-MonsterConnectCo.,Ltd/Lecture/KOSEN69 - software-security/slides/pptx/assets/logo-small.png">    </p:cNvPr>
+          <p:cNvPr id="2" name="Image 0" descr="/private/tmp/claude-501/-Users-pop7-Library-CloudStorage-OneDrive-MonsterConnectCo--Ltd-Lecture-KOSEN69---software-security/e6d6556f-17de-403d-a9a0-cf2f846149b4/scratchpad/tree/slides/pptx/assets/logo-small.png">    </p:cNvPr>
           <p:cNvPicPr>
             <a:picLocks noChangeAspect="1"/>
           </p:cNvPicPr>
@@ -2455,7 +2456,7 @@
       </p:sp>
       <p:pic>
         <p:nvPicPr>
-          <p:cNvPr id="8" name="Image 1" descr="/Users/pop7/Library/CloudStorage/OneDrive-MonsterConnectCo.,Ltd/Lecture/KOSEN69 - software-security/slides/pptx/assets/logo-small.png">    </p:cNvPr>
+          <p:cNvPr id="8" name="Image 1" descr="/private/tmp/claude-501/-Users-pop7-Library-CloudStorage-OneDrive-MonsterConnectCo--Ltd-Lecture-KOSEN69---software-security/e6d6556f-17de-403d-a9a0-cf2f846149b4/scratchpad/tree/slides/pptx/assets/logo-small.png">    </p:cNvPr>
           <p:cNvPicPr>
             <a:picLocks noChangeAspect="1"/>
           </p:cNvPicPr>
@@ -2940,7 +2941,7 @@
       </p:sp>
       <p:pic>
         <p:nvPicPr>
-          <p:cNvPr id="15" name="Image 1" descr="/Users/pop7/Library/CloudStorage/OneDrive-MonsterConnectCo.,Ltd/Lecture/KOSEN69 - software-security/slides/pptx/assets/logo-small.png">    </p:cNvPr>
+          <p:cNvPr id="15" name="Image 1" descr="/private/tmp/claude-501/-Users-pop7-Library-CloudStorage-OneDrive-MonsterConnectCo--Ltd-Lecture-KOSEN69---software-security/e6d6556f-17de-403d-a9a0-cf2f846149b4/scratchpad/tree/slides/pptx/assets/logo-small.png">    </p:cNvPr>
           <p:cNvPicPr>
             <a:picLocks noChangeAspect="1"/>
           </p:cNvPicPr>
@@ -3325,7 +3326,7 @@
       </p:sp>
       <p:pic>
         <p:nvPicPr>
-          <p:cNvPr id="10" name="Image 1" descr="/Users/pop7/Library/CloudStorage/OneDrive-MonsterConnectCo.,Ltd/Lecture/KOSEN69 - software-security/slides/pptx/assets/logo-small.png">    </p:cNvPr>
+          <p:cNvPr id="10" name="Image 1" descr="/private/tmp/claude-501/-Users-pop7-Library-CloudStorage-OneDrive-MonsterConnectCo--Ltd-Lecture-KOSEN69---software-security/e6d6556f-17de-403d-a9a0-cf2f846149b4/scratchpad/tree/slides/pptx/assets/logo-small.png">    </p:cNvPr>
           <p:cNvPicPr>
             <a:picLocks noChangeAspect="1"/>
           </p:cNvPicPr>
@@ -3626,7 +3627,7 @@
       </p:sp>
       <p:pic>
         <p:nvPicPr>
-          <p:cNvPr id="8" name="Image 1" descr="/Users/pop7/Library/CloudStorage/OneDrive-MonsterConnectCo.,Ltd/Lecture/KOSEN69 - software-security/slides/pptx/assets/logo-small.png">    </p:cNvPr>
+          <p:cNvPr id="8" name="Image 1" descr="/private/tmp/claude-501/-Users-pop7-Library-CloudStorage-OneDrive-MonsterConnectCo--Ltd-Lecture-KOSEN69---software-security/e6d6556f-17de-403d-a9a0-cf2f846149b4/scratchpad/tree/slides/pptx/assets/logo-small.png">    </p:cNvPr>
           <p:cNvPicPr>
             <a:picLocks noChangeAspect="1"/>
           </p:cNvPicPr>
@@ -3760,7 +3761,7 @@
       </p:sp>
       <p:pic>
         <p:nvPicPr>
-          <p:cNvPr id="4" name="Image 0" descr="/Users/pop7/Library/CloudStorage/OneDrive-MonsterConnectCo.,Ltd/Lecture/KOSEN69 - software-security/slides/pptx/assets/logo-small.png">    </p:cNvPr>
+          <p:cNvPr id="4" name="Image 0" descr="/private/tmp/claude-501/-Users-pop7-Library-CloudStorage-OneDrive-MonsterConnectCo--Ltd-Lecture-KOSEN69---software-security/e6d6556f-17de-403d-a9a0-cf2f846149b4/scratchpad/tree/slides/pptx/assets/logo-small.png">    </p:cNvPr>
           <p:cNvPicPr>
             <a:picLocks noChangeAspect="1"/>
           </p:cNvPicPr>
@@ -4103,7 +4104,7 @@
       </p:sp>
       <p:pic>
         <p:nvPicPr>
-          <p:cNvPr id="8" name="Image 1" descr="/Users/pop7/Library/CloudStorage/OneDrive-MonsterConnectCo.,Ltd/Lecture/KOSEN69 - software-security/slides/pptx/assets/logo-small.png">    </p:cNvPr>
+          <p:cNvPr id="8" name="Image 1" descr="/private/tmp/claude-501/-Users-pop7-Library-CloudStorage-OneDrive-MonsterConnectCo--Ltd-Lecture-KOSEN69---software-security/e6d6556f-17de-403d-a9a0-cf2f846149b4/scratchpad/tree/slides/pptx/assets/logo-small.png">    </p:cNvPr>
           <p:cNvPicPr>
             <a:picLocks noChangeAspect="1"/>
           </p:cNvPicPr>
@@ -4404,7 +4405,7 @@
       </p:sp>
       <p:pic>
         <p:nvPicPr>
-          <p:cNvPr id="8" name="Image 1" descr="/Users/pop7/Library/CloudStorage/OneDrive-MonsterConnectCo.,Ltd/Lecture/KOSEN69 - software-security/slides/pptx/assets/logo-small.png">    </p:cNvPr>
+          <p:cNvPr id="8" name="Image 1" descr="/private/tmp/claude-501/-Users-pop7-Library-CloudStorage-OneDrive-MonsterConnectCo--Ltd-Lecture-KOSEN69---software-security/e6d6556f-17de-403d-a9a0-cf2f846149b4/scratchpad/tree/slides/pptx/assets/logo-small.png">    </p:cNvPr>
           <p:cNvPicPr>
             <a:picLocks noChangeAspect="1"/>
           </p:cNvPicPr>
@@ -4725,7 +4726,7 @@
       </p:sp>
       <p:pic>
         <p:nvPicPr>
-          <p:cNvPr id="9" name="Image 1" descr="/Users/pop7/Library/CloudStorage/OneDrive-MonsterConnectCo.,Ltd/Lecture/KOSEN69 - software-security/slides/pptx/assets/logo-small.png">    </p:cNvPr>
+          <p:cNvPr id="9" name="Image 1" descr="/private/tmp/claude-501/-Users-pop7-Library-CloudStorage-OneDrive-MonsterConnectCo--Ltd-Lecture-KOSEN69---software-security/e6d6556f-17de-403d-a9a0-cf2f846149b4/scratchpad/tree/slides/pptx/assets/logo-small.png">    </p:cNvPr>
           <p:cNvPicPr>
             <a:picLocks noChangeAspect="1"/>
           </p:cNvPicPr>
@@ -5026,7 +5027,7 @@
       </p:sp>
       <p:pic>
         <p:nvPicPr>
-          <p:cNvPr id="8" name="Image 1" descr="/Users/pop7/Library/CloudStorage/OneDrive-MonsterConnectCo.,Ltd/Lecture/KOSEN69 - software-security/slides/pptx/assets/logo-small.png">    </p:cNvPr>
+          <p:cNvPr id="8" name="Image 1" descr="/private/tmp/claude-501/-Users-pop7-Library-CloudStorage-OneDrive-MonsterConnectCo--Ltd-Lecture-KOSEN69---software-security/e6d6556f-17de-403d-a9a0-cf2f846149b4/scratchpad/tree/slides/pptx/assets/logo-small.png">    </p:cNvPr>
           <p:cNvPicPr>
             <a:picLocks noChangeAspect="1"/>
           </p:cNvPicPr>
@@ -5391,7 +5392,7 @@
       </p:sp>
       <p:pic>
         <p:nvPicPr>
-          <p:cNvPr id="10" name="Image 1" descr="/Users/pop7/Library/CloudStorage/OneDrive-MonsterConnectCo.,Ltd/Lecture/KOSEN69 - software-security/slides/pptx/assets/logo-small.png">    </p:cNvPr>
+          <p:cNvPr id="10" name="Image 1" descr="/private/tmp/claude-501/-Users-pop7-Library-CloudStorage-OneDrive-MonsterConnectCo--Ltd-Lecture-KOSEN69---software-security/e6d6556f-17de-403d-a9a0-cf2f846149b4/scratchpad/tree/slides/pptx/assets/logo-small.png">    </p:cNvPr>
           <p:cNvPicPr>
             <a:picLocks noChangeAspect="1"/>
           </p:cNvPicPr>
@@ -5876,7 +5877,7 @@
       </p:sp>
       <p:pic>
         <p:nvPicPr>
-          <p:cNvPr id="15" name="Image 1" descr="/Users/pop7/Library/CloudStorage/OneDrive-MonsterConnectCo.,Ltd/Lecture/KOSEN69 - software-security/slides/pptx/assets/logo-small.png">    </p:cNvPr>
+          <p:cNvPr id="15" name="Image 1" descr="/private/tmp/claude-501/-Users-pop7-Library-CloudStorage-OneDrive-MonsterConnectCo--Ltd-Lecture-KOSEN69---software-security/e6d6556f-17de-403d-a9a0-cf2f846149b4/scratchpad/tree/slides/pptx/assets/logo-small.png">    </p:cNvPr>
           <p:cNvPicPr>
             <a:picLocks noChangeAspect="1"/>
           </p:cNvPicPr>
@@ -6219,7 +6220,7 @@
       </p:sp>
       <p:pic>
         <p:nvPicPr>
-          <p:cNvPr id="8" name="Image 1" descr="/Users/pop7/Library/CloudStorage/OneDrive-MonsterConnectCo.,Ltd/Lecture/KOSEN69 - software-security/slides/pptx/assets/logo-small.png">    </p:cNvPr>
+          <p:cNvPr id="8" name="Image 1" descr="/private/tmp/claude-501/-Users-pop7-Library-CloudStorage-OneDrive-MonsterConnectCo--Ltd-Lecture-KOSEN69---software-security/e6d6556f-17de-403d-a9a0-cf2f846149b4/scratchpad/tree/slides/pptx/assets/logo-small.png">    </p:cNvPr>
           <p:cNvPicPr>
             <a:picLocks noChangeAspect="1"/>
           </p:cNvPicPr>
@@ -6363,16 +6364,40 @@
           </a:p>
         </p:txBody>
       </p:sp>
-      <p:sp>
-        <p:nvSpPr>
-          <p:cNvPr id="5" name="Text 2"/>
-          <p:cNvSpPr/>
-          <p:nvPr/>
-        </p:nvSpPr>
-        <p:spPr>
-          <a:xfrm>
-            <a:off x="548640" y="1325880"/>
-            <a:ext cx="8046720" cy="2194560"/>
+      <p:pic>
+        <p:nvPicPr>
+          <p:cNvPr id="5" name="Image 1" descr="A vertical attack chain from fuzzing finding the crash, to the unchecked strcpy overflow, to the overwritten return address, to a ret2win shell. Three mitigations cut this chain at different links: FORTIFY_SOURCE aborts at copy time, before any overwrite — this hardened build traps here, which students often misread as the canary. The stack canary only detects the smash at return, after the copy already happened. ASLR/PIE randomizes addresses so the fixed win() address is wrong. NX/DEP stops the OTHER exploitation path (injected shellcode), not this one.">    </p:cNvPr>
+          <p:cNvPicPr>
+            <a:picLocks noChangeAspect="1"/>
+          </p:cNvPicPr>
+          <p:nvPr/>
+        </p:nvPicPr>
+        <p:blipFill>
+          <a:blip r:embed="rId2"/>
+          <a:stretch>
+            <a:fillRect/>
+          </a:stretch>
+        </p:blipFill>
+        <p:spPr>
+          <a:xfrm>
+            <a:off x="2627264" y="1097280"/>
+            <a:ext cx="3889472" cy="3566160"/>
+          </a:xfrm>
+          <a:prstGeom prst="rect">
+            <a:avLst/>
+          </a:prstGeom>
+        </p:spPr>
+      </p:pic>
+      <p:sp>
+        <p:nvSpPr>
+          <p:cNvPr id="6" name="Text 2"/>
+          <p:cNvSpPr/>
+          <p:nvPr/>
+        </p:nvSpPr>
+        <p:spPr>
+          <a:xfrm>
+            <a:off x="457200" y="4800600"/>
+            <a:ext cx="6949440" cy="274320"/>
           </a:xfrm>
           <a:prstGeom prst="rect">
             <a:avLst/>
@@ -6381,62 +6406,21 @@
           <a:ln/>
         </p:spPr>
         <p:txBody>
-          <a:bodyPr wrap="square" lIns="0" tIns="0" rIns="0" bIns="0" rtlCol="0" anchor="t">
-            <a:normAutofit/>
-          </a:bodyPr>
+          <a:bodyPr wrap="square" lIns="0" tIns="0" rIns="0" bIns="0" rtlCol="0" anchor="ctr"/>
           <a:lstStyle/>
           <a:p>
             <a:pPr indent="0" marL="0">
               <a:buNone/>
             </a:pPr>
             <a:r>
-              <a:rPr lang="en-US" sz="1400" dirty="0">
-                <a:solidFill>
-                  <a:srgbClr val="1F2937"/>
+              <a:rPr lang="en-US" sz="900" dirty="0">
+                <a:solidFill>
+                  <a:srgbClr val="64748B"/>
                 </a:solidFill>
                 <a:latin typeface="Calibri" pitchFamily="34" charset="0"/>
                 <a:ea typeface="Calibri" pitchFamily="34" charset="-122"/>
                 <a:cs typeface="Calibri" pitchFamily="34" charset="-120"/>
               </a:rPr>
-              <a:t>See diagram: A vertical attack chain from fuzzing finding the crash, to the unchecked strcpy overflow, to the overwritten return address, to a ret2win shell. Three mitigations cut this chain at different links: FORTIFY_SOURCE aborts at copy time, before any overwrite — this hardened build traps here, which students often misread as the canary. The stack canary only detects the smash at return, after the copy already happened. ASLR/PIE randomizes addresses so the fixed win() address is wrong. NX/DEP stops the OTHER exploitation path (injected shellcode), not this one. (web only)</a:t>
-            </a:r>
-            <a:endParaRPr lang="en-US" sz="1400" dirty="0"/>
-          </a:p>
-        </p:txBody>
-      </p:sp>
-      <p:sp>
-        <p:nvSpPr>
-          <p:cNvPr id="6" name="Text 3"/>
-          <p:cNvSpPr/>
-          <p:nvPr/>
-        </p:nvSpPr>
-        <p:spPr>
-          <a:xfrm>
-            <a:off x="457200" y="4800600"/>
-            <a:ext cx="6949440" cy="274320"/>
-          </a:xfrm>
-          <a:prstGeom prst="rect">
-            <a:avLst/>
-          </a:prstGeom>
-          <a:noFill/>
-          <a:ln/>
-        </p:spPr>
-        <p:txBody>
-          <a:bodyPr wrap="square" lIns="0" tIns="0" rIns="0" bIns="0" rtlCol="0" anchor="ctr"/>
-          <a:lstStyle/>
-          <a:p>
-            <a:pPr indent="0" marL="0">
-              <a:buNone/>
-            </a:pPr>
-            <a:r>
-              <a:rPr lang="en-US" sz="900" dirty="0">
-                <a:solidFill>
-                  <a:srgbClr val="64748B"/>
-                </a:solidFill>
-                <a:latin typeface="Calibri" pitchFamily="34" charset="0"/>
-                <a:ea typeface="Calibri" pitchFamily="34" charset="-122"/>
-                <a:cs typeface="Calibri" pitchFamily="34" charset="-120"/>
-              </a:rPr>
               <a:t>Software Security · Week 11</a:t>
             </a:r>
             <a:endParaRPr lang="en-US" sz="900" dirty="0"/>
@@ -6445,14 +6429,14 @@
       </p:sp>
       <p:pic>
         <p:nvPicPr>
-          <p:cNvPr id="7" name="Image 1" descr="/Users/pop7/Library/CloudStorage/OneDrive-MonsterConnectCo.,Ltd/Lecture/KOSEN69 - software-security/slides/pptx/assets/logo-small.png">    </p:cNvPr>
+          <p:cNvPr id="7" name="Image 2" descr="/private/tmp/claude-501/-Users-pop7-Library-CloudStorage-OneDrive-MonsterConnectCo--Ltd-Lecture-KOSEN69---software-security/e6d6556f-17de-403d-a9a0-cf2f846149b4/scratchpad/tree/slides/pptx/assets/logo-small.png">    </p:cNvPr>
           <p:cNvPicPr>
             <a:picLocks noChangeAspect="1"/>
           </p:cNvPicPr>
           <p:nvPr/>
         </p:nvPicPr>
         <p:blipFill>
-          <a:blip r:embed="rId2"/>
+          <a:blip r:embed="rId3"/>
           <a:stretch>
             <a:fillRect/>
           </a:stretch>
